--- a/pitch/Touchdown-Inference-Lab-Hackathon.pptx
+++ b/pitch/Touchdown-Inference-Lab-Hackathon.pptx
@@ -3098,8 +3098,8 @@
         </p:nvSpPr>
         <p:spPr>
           <a:xfrm>
-            <a:off x="502920" y="310896"/>
-            <a:ext cx="310896" cy="310896"/>
+            <a:off x="502920" y="292608"/>
+            <a:ext cx="292608" cy="292608"/>
           </a:xfrm>
           <a:prstGeom prst="rect">
             <a:avLst/>
@@ -3142,8 +3142,8 @@
         </p:nvSpPr>
         <p:spPr>
           <a:xfrm>
-            <a:off x="502920" y="310896"/>
-            <a:ext cx="310896" cy="310896"/>
+            <a:off x="502920" y="292608"/>
+            <a:ext cx="292608" cy="292608"/>
           </a:xfrm>
           <a:prstGeom prst="rect">
             <a:avLst/>
@@ -3187,8 +3187,8 @@
         </p:nvSpPr>
         <p:spPr>
           <a:xfrm>
-            <a:off x="941832" y="274320"/>
-            <a:ext cx="3657600" cy="365760"/>
+            <a:off x="923544" y="256032"/>
+            <a:ext cx="3657600" cy="347472"/>
           </a:xfrm>
           <a:prstGeom prst="rect">
             <a:avLst/>
@@ -3232,7 +3232,7 @@
         </p:nvSpPr>
         <p:spPr>
           <a:xfrm>
-            <a:off x="502920" y="566928"/>
+            <a:off x="502920" y="713232"/>
             <a:ext cx="11185855" cy="274320"/>
           </a:xfrm>
           <a:prstGeom prst="rect">
@@ -3277,8 +3277,8 @@
         </p:nvSpPr>
         <p:spPr>
           <a:xfrm>
-            <a:off x="502920" y="868680"/>
-            <a:ext cx="11185855" cy="1417320"/>
+            <a:off x="502920" y="1014984"/>
+            <a:ext cx="11185855" cy="1280160"/>
           </a:xfrm>
           <a:prstGeom prst="rect">
             <a:avLst/>
@@ -3293,7 +3293,7 @@
           <a:p>
             <a:pPr algn="l">
               <a:lnSpc>
-                <a:spcPct val="105000"/>
+                <a:spcPct val="108000"/>
               </a:lnSpc>
               <a:spcBef>
                 <a:spcPts val="0"/>
@@ -3331,7 +3331,7 @@
         </p:nvSpPr>
         <p:spPr>
           <a:xfrm>
-            <a:off x="502920" y="1965960"/>
+            <a:off x="502920" y="2112264"/>
             <a:ext cx="7863840" cy="960120"/>
           </a:xfrm>
           <a:prstGeom prst="rect">
@@ -3439,7 +3439,7 @@
         </p:nvSpPr>
         <p:spPr>
           <a:xfrm>
-            <a:off x="502920" y="3017520"/>
+            <a:off x="502920" y="3163824"/>
             <a:ext cx="38100" cy="777240"/>
           </a:xfrm>
           <a:prstGeom prst="rect">
@@ -3483,7 +3483,7 @@
         </p:nvSpPr>
         <p:spPr>
           <a:xfrm>
-            <a:off x="667512" y="3035808"/>
+            <a:off x="667512" y="3182112"/>
             <a:ext cx="7699248" cy="777240"/>
           </a:xfrm>
           <a:prstGeom prst="rect">
@@ -3537,7 +3537,7 @@
         </p:nvSpPr>
         <p:spPr>
           <a:xfrm>
-            <a:off x="8641080" y="1965960"/>
+            <a:off x="8641080" y="2112264"/>
             <a:ext cx="3047695" cy="1783080"/>
           </a:xfrm>
           <a:prstGeom prst="rect">
@@ -3592,7 +3592,7 @@
         </p:blipFill>
         <p:spPr>
           <a:xfrm>
-            <a:off x="8695944" y="2020824"/>
+            <a:off x="8695944" y="2167128"/>
             <a:ext cx="2937967" cy="1417320"/>
           </a:xfrm>
           <a:prstGeom prst="rect">
@@ -3608,7 +3608,7 @@
         </p:nvSpPr>
         <p:spPr>
           <a:xfrm>
-            <a:off x="8695944" y="3483864"/>
+            <a:off x="8695944" y="3630168"/>
             <a:ext cx="2937967" cy="457200"/>
           </a:xfrm>
           <a:prstGeom prst="rect">
@@ -3653,7 +3653,7 @@
         </p:nvSpPr>
         <p:spPr>
           <a:xfrm>
-            <a:off x="502920" y="3977639"/>
+            <a:off x="502920" y="4123943"/>
             <a:ext cx="3606698" cy="1965960"/>
           </a:xfrm>
           <a:prstGeom prst="rect">
@@ -3699,7 +3699,7 @@
         </p:nvSpPr>
         <p:spPr>
           <a:xfrm>
-            <a:off x="649224" y="4123943"/>
+            <a:off x="649224" y="4270247"/>
             <a:ext cx="3314090" cy="1673352"/>
           </a:xfrm>
           <a:prstGeom prst="rect">
@@ -3812,7 +3812,7 @@
         </p:nvSpPr>
         <p:spPr>
           <a:xfrm>
-            <a:off x="4292498" y="3977639"/>
+            <a:off x="4292498" y="4123943"/>
             <a:ext cx="3606698" cy="1965960"/>
           </a:xfrm>
           <a:prstGeom prst="rect">
@@ -3858,7 +3858,7 @@
         </p:nvSpPr>
         <p:spPr>
           <a:xfrm>
-            <a:off x="4438802" y="4123943"/>
+            <a:off x="4438802" y="4270247"/>
             <a:ext cx="3314090" cy="1673352"/>
           </a:xfrm>
           <a:prstGeom prst="rect">
@@ -4007,7 +4007,7 @@
         </p:nvSpPr>
         <p:spPr>
           <a:xfrm>
-            <a:off x="8082076" y="3977639"/>
+            <a:off x="8082076" y="4123943"/>
             <a:ext cx="3606698" cy="1965960"/>
           </a:xfrm>
           <a:prstGeom prst="rect">
@@ -4053,7 +4053,7 @@
         </p:nvSpPr>
         <p:spPr>
           <a:xfrm>
-            <a:off x="8228380" y="4123943"/>
+            <a:off x="8228380" y="4270247"/>
             <a:ext cx="3314090" cy="1673352"/>
           </a:xfrm>
           <a:prstGeom prst="rect">
@@ -4129,7 +4129,7 @@
         </p:nvSpPr>
         <p:spPr>
           <a:xfrm>
-            <a:off x="502920" y="6355080"/>
+            <a:off x="502920" y="6473952"/>
             <a:ext cx="11185855" cy="15875"/>
           </a:xfrm>
           <a:prstGeom prst="rect">
@@ -4173,7 +4173,7 @@
         </p:nvSpPr>
         <p:spPr>
           <a:xfrm>
-            <a:off x="502920" y="6428232"/>
+            <a:off x="502920" y="6547104"/>
             <a:ext cx="8229600" cy="274320"/>
           </a:xfrm>
           <a:prstGeom prst="rect">
@@ -4218,7 +4218,7 @@
         </p:nvSpPr>
         <p:spPr>
           <a:xfrm>
-            <a:off x="9859975" y="6428232"/>
+            <a:off x="9859975" y="6547104"/>
             <a:ext cx="1828800" cy="274320"/>
           </a:xfrm>
           <a:prstGeom prst="rect">
@@ -4281,8 +4281,8 @@
         </p:nvSpPr>
         <p:spPr>
           <a:xfrm>
-            <a:off x="502920" y="310896"/>
-            <a:ext cx="310896" cy="310896"/>
+            <a:off x="502920" y="292608"/>
+            <a:ext cx="292608" cy="292608"/>
           </a:xfrm>
           <a:prstGeom prst="rect">
             <a:avLst/>
@@ -4325,8 +4325,8 @@
         </p:nvSpPr>
         <p:spPr>
           <a:xfrm>
-            <a:off x="502920" y="310896"/>
-            <a:ext cx="310896" cy="310896"/>
+            <a:off x="502920" y="292608"/>
+            <a:ext cx="292608" cy="292608"/>
           </a:xfrm>
           <a:prstGeom prst="rect">
             <a:avLst/>
@@ -4370,8 +4370,8 @@
         </p:nvSpPr>
         <p:spPr>
           <a:xfrm>
-            <a:off x="941832" y="274320"/>
-            <a:ext cx="3657600" cy="365760"/>
+            <a:off x="923544" y="256032"/>
+            <a:ext cx="3657600" cy="347472"/>
           </a:xfrm>
           <a:prstGeom prst="rect">
             <a:avLst/>
@@ -4415,7 +4415,7 @@
         </p:nvSpPr>
         <p:spPr>
           <a:xfrm>
-            <a:off x="502920" y="566928"/>
+            <a:off x="502920" y="713232"/>
             <a:ext cx="11185855" cy="274320"/>
           </a:xfrm>
           <a:prstGeom prst="rect">
@@ -4460,8 +4460,8 @@
         </p:nvSpPr>
         <p:spPr>
           <a:xfrm>
-            <a:off x="502920" y="868680"/>
-            <a:ext cx="11185855" cy="1417320"/>
+            <a:off x="502920" y="1014984"/>
+            <a:ext cx="11185855" cy="1280160"/>
           </a:xfrm>
           <a:prstGeom prst="rect">
             <a:avLst/>
@@ -4476,7 +4476,7 @@
           <a:p>
             <a:pPr algn="l">
               <a:lnSpc>
-                <a:spcPct val="105000"/>
+                <a:spcPct val="108000"/>
               </a:lnSpc>
               <a:spcBef>
                 <a:spcPts val="0"/>
@@ -4514,7 +4514,7 @@
         </p:nvSpPr>
         <p:spPr>
           <a:xfrm>
-            <a:off x="502920" y="1920240"/>
+            <a:off x="502920" y="2066544"/>
             <a:ext cx="5501487" cy="1417320"/>
           </a:xfrm>
           <a:prstGeom prst="rect">
@@ -4560,7 +4560,7 @@
         </p:nvSpPr>
         <p:spPr>
           <a:xfrm>
-            <a:off x="649224" y="2066544"/>
+            <a:off x="649224" y="2212848"/>
             <a:ext cx="5208879" cy="1124712"/>
           </a:xfrm>
           <a:prstGeom prst="rect">
@@ -4672,7 +4672,7 @@
         </p:nvSpPr>
         <p:spPr>
           <a:xfrm>
-            <a:off x="6187287" y="1920240"/>
+            <a:off x="6187287" y="2066544"/>
             <a:ext cx="5501487" cy="1417320"/>
           </a:xfrm>
           <a:prstGeom prst="rect">
@@ -4718,7 +4718,7 @@
         </p:nvSpPr>
         <p:spPr>
           <a:xfrm>
-            <a:off x="6333591" y="2066544"/>
+            <a:off x="6333591" y="2212848"/>
             <a:ext cx="5208879" cy="1124712"/>
           </a:xfrm>
           <a:prstGeom prst="rect">
@@ -4794,7 +4794,7 @@
         </p:nvSpPr>
         <p:spPr>
           <a:xfrm>
-            <a:off x="502920" y="3520440"/>
+            <a:off x="502920" y="3666744"/>
             <a:ext cx="3606698" cy="1417320"/>
           </a:xfrm>
           <a:prstGeom prst="rect">
@@ -4840,7 +4840,7 @@
         </p:nvSpPr>
         <p:spPr>
           <a:xfrm>
-            <a:off x="649224" y="3666744"/>
+            <a:off x="649224" y="3813048"/>
             <a:ext cx="3314090" cy="1124712"/>
           </a:xfrm>
           <a:prstGeom prst="rect">
@@ -4951,7 +4951,7 @@
         </p:nvSpPr>
         <p:spPr>
           <a:xfrm>
-            <a:off x="4292498" y="3520440"/>
+            <a:off x="4292498" y="3666744"/>
             <a:ext cx="3606698" cy="1417320"/>
           </a:xfrm>
           <a:prstGeom prst="rect">
@@ -4997,7 +4997,7 @@
         </p:nvSpPr>
         <p:spPr>
           <a:xfrm>
-            <a:off x="4438802" y="3666744"/>
+            <a:off x="4438802" y="3813048"/>
             <a:ext cx="3314090" cy="1124712"/>
           </a:xfrm>
           <a:prstGeom prst="rect">
@@ -5108,7 +5108,7 @@
         </p:nvSpPr>
         <p:spPr>
           <a:xfrm>
-            <a:off x="8082076" y="3520440"/>
+            <a:off x="8082076" y="3666744"/>
             <a:ext cx="3606698" cy="1417320"/>
           </a:xfrm>
           <a:prstGeom prst="rect">
@@ -5154,7 +5154,7 @@
         </p:nvSpPr>
         <p:spPr>
           <a:xfrm>
-            <a:off x="8228380" y="3666744"/>
+            <a:off x="8228380" y="3813048"/>
             <a:ext cx="3314090" cy="1124712"/>
           </a:xfrm>
           <a:prstGeom prst="rect">
@@ -5265,7 +5265,7 @@
         </p:nvSpPr>
         <p:spPr>
           <a:xfrm>
-            <a:off x="502920" y="5074920"/>
+            <a:off x="502920" y="5221224"/>
             <a:ext cx="11185855" cy="1051560"/>
           </a:xfrm>
           <a:prstGeom prst="rect">
@@ -5311,7 +5311,7 @@
         </p:nvSpPr>
         <p:spPr>
           <a:xfrm>
-            <a:off x="667512" y="5166360"/>
+            <a:off x="667512" y="5312664"/>
             <a:ext cx="10856671" cy="868680"/>
           </a:xfrm>
           <a:prstGeom prst="rect">
@@ -5372,7 +5372,7 @@
                 <a:solidFill>
                   <a:srgbClr val="0A0A0A"/>
                 </a:solidFill>
-                <a:latin typeface="Consolas"/>
+                <a:latin typeface="Courier New"/>
               </a:rPr>
               <a:t>total input = input_tokens + cache_creation_input_tokens + cache_read_input_tokens</a:t>
             </a:r>
@@ -5468,7 +5468,7 @@
         </p:nvSpPr>
         <p:spPr>
           <a:xfrm>
-            <a:off x="502920" y="6355080"/>
+            <a:off x="502920" y="6473952"/>
             <a:ext cx="11185855" cy="15875"/>
           </a:xfrm>
           <a:prstGeom prst="rect">
@@ -5512,7 +5512,7 @@
         </p:nvSpPr>
         <p:spPr>
           <a:xfrm>
-            <a:off x="502920" y="6428232"/>
+            <a:off x="502920" y="6547104"/>
             <a:ext cx="8229600" cy="274320"/>
           </a:xfrm>
           <a:prstGeom prst="rect">
@@ -5557,7 +5557,7 @@
         </p:nvSpPr>
         <p:spPr>
           <a:xfrm>
-            <a:off x="9859975" y="6428232"/>
+            <a:off x="9859975" y="6547104"/>
             <a:ext cx="1828800" cy="274320"/>
           </a:xfrm>
           <a:prstGeom prst="rect">
@@ -5620,8 +5620,8 @@
         </p:nvSpPr>
         <p:spPr>
           <a:xfrm>
-            <a:off x="502920" y="310896"/>
-            <a:ext cx="310896" cy="310896"/>
+            <a:off x="502920" y="292608"/>
+            <a:ext cx="292608" cy="292608"/>
           </a:xfrm>
           <a:prstGeom prst="rect">
             <a:avLst/>
@@ -5664,8 +5664,8 @@
         </p:nvSpPr>
         <p:spPr>
           <a:xfrm>
-            <a:off x="502920" y="310896"/>
-            <a:ext cx="310896" cy="310896"/>
+            <a:off x="502920" y="292608"/>
+            <a:ext cx="292608" cy="292608"/>
           </a:xfrm>
           <a:prstGeom prst="rect">
             <a:avLst/>
@@ -5709,8 +5709,8 @@
         </p:nvSpPr>
         <p:spPr>
           <a:xfrm>
-            <a:off x="941832" y="274320"/>
-            <a:ext cx="3657600" cy="365760"/>
+            <a:off x="923544" y="256032"/>
+            <a:ext cx="3657600" cy="347472"/>
           </a:xfrm>
           <a:prstGeom prst="rect">
             <a:avLst/>
@@ -5754,7 +5754,7 @@
         </p:nvSpPr>
         <p:spPr>
           <a:xfrm>
-            <a:off x="502920" y="566928"/>
+            <a:off x="502920" y="713232"/>
             <a:ext cx="11185855" cy="274320"/>
           </a:xfrm>
           <a:prstGeom prst="rect">
@@ -5799,8 +5799,8 @@
         </p:nvSpPr>
         <p:spPr>
           <a:xfrm>
-            <a:off x="502920" y="868680"/>
-            <a:ext cx="11185855" cy="1417320"/>
+            <a:off x="502920" y="1014984"/>
+            <a:ext cx="11185855" cy="1280160"/>
           </a:xfrm>
           <a:prstGeom prst="rect">
             <a:avLst/>
@@ -5815,7 +5815,7 @@
           <a:p>
             <a:pPr algn="l">
               <a:lnSpc>
-                <a:spcPct val="105000"/>
+                <a:spcPct val="108000"/>
               </a:lnSpc>
               <a:spcBef>
                 <a:spcPts val="0"/>
@@ -5853,7 +5853,7 @@
         </p:nvSpPr>
         <p:spPr>
           <a:xfrm>
-            <a:off x="502920" y="1874519"/>
+            <a:off x="502920" y="2020823"/>
             <a:ext cx="7863840" cy="2880360"/>
           </a:xfrm>
           <a:prstGeom prst="rect">
@@ -5889,227 +5889,25 @@
           </a:p>
         </p:txBody>
       </p:sp>
-      <p:pic>
-        <p:nvPicPr>
-          <p:cNvPr id="8" name="Picture 7" descr="lifecycle-contact-sheet.jpg"/>
-          <p:cNvPicPr>
-            <a:picLocks noChangeAspect="1"/>
-          </p:cNvPicPr>
-          <p:nvPr/>
-        </p:nvPicPr>
-        <p:blipFill>
-          <a:blip r:embed="rId2"/>
-          <a:stretch>
-            <a:fillRect/>
-          </a:stretch>
-        </p:blipFill>
-        <p:spPr>
-          <a:xfrm>
-            <a:off x="502920" y="1874519"/>
-            <a:ext cx="7863840" cy="2880360"/>
-          </a:xfrm>
-          <a:prstGeom prst="rect">
-            <a:avLst/>
-          </a:prstGeom>
-        </p:spPr>
-      </p:pic>
-      <p:sp>
-        <p:nvSpPr>
-          <p:cNvPr id="9" name="TextBox 8"/>
-          <p:cNvSpPr txBox="1"/>
-          <p:nvPr/>
-        </p:nvSpPr>
-        <p:spPr>
-          <a:xfrm>
-            <a:off x="502920" y="4343399"/>
-            <a:ext cx="7863840" cy="365760"/>
-          </a:xfrm>
-          <a:prstGeom prst="rect">
-            <a:avLst/>
-          </a:prstGeom>
-          <a:noFill/>
-        </p:spPr>
-        <p:txBody>
-          <a:bodyPr wrap="square" anchor="t" lIns="0" rIns="0" tIns="0" bIns="0">
-            <a:spAutoFit/>
-          </a:bodyPr>
-          <a:lstStyle/>
-          <a:p>
-            <a:pPr algn="l">
-              <a:lnSpc>
-                <a:spcPct val="100000"/>
-              </a:lnSpc>
-              <a:spcBef>
-                <a:spcPts val="0"/>
-              </a:spcBef>
-              <a:spcAft>
-                <a:spcPts val="0"/>
-              </a:spcAft>
-            </a:pPr>
-            <a:r>
-              <a:rPr sz="1000" b="1" i="0">
-                <a:solidFill>
-                  <a:srgbClr val="FFFFFF"/>
-                </a:solidFill>
-                <a:latin typeface="Arial"/>
-                <a:hlinkClick r:id="rId3"/>
-              </a:rPr>
-              <a:t>▶  Open touchdown-inference-lab-lifecycle-demo.mp4 (demo-video/)</a:t>
-            </a:r>
-          </a:p>
-        </p:txBody>
-      </p:sp>
-      <p:sp>
-        <p:nvSpPr>
-          <p:cNvPr id="10" name="TextBox 9"/>
-          <p:cNvSpPr txBox="1"/>
-          <p:nvPr/>
-        </p:nvSpPr>
-        <p:spPr>
-          <a:xfrm>
-            <a:off x="502920" y="4892039"/>
-            <a:ext cx="7863840" cy="274320"/>
-          </a:xfrm>
-          <a:prstGeom prst="rect">
-            <a:avLst/>
-          </a:prstGeom>
-          <a:noFill/>
-        </p:spPr>
-        <p:txBody>
-          <a:bodyPr wrap="square" anchor="t" lIns="0" rIns="0" tIns="0" bIns="0">
-            <a:spAutoFit/>
-          </a:bodyPr>
-          <a:lstStyle/>
-          <a:p>
-            <a:pPr algn="l">
-              <a:lnSpc>
-                <a:spcPct val="100000"/>
-              </a:lnSpc>
-              <a:spcBef>
-                <a:spcPts val="0"/>
-              </a:spcBef>
-              <a:spcAft>
-                <a:spcPts val="0"/>
-              </a:spcAft>
-            </a:pPr>
-            <a:r>
-              <a:rPr sz="850" b="1" i="0" spc="40">
-                <a:solidFill>
-                  <a:srgbClr val="999999"/>
-                </a:solidFill>
-                <a:latin typeface="Arial"/>
-              </a:rPr>
-              <a:t>1:48 RUNTIME · UNDER THE 2:00 CAP      1280 × 720 · H.264 · 30 FPS      BROWSER-ONLY WALKTHROUGH OF THE LIVE LOCAL BUILD</a:t>
-            </a:r>
-          </a:p>
-        </p:txBody>
-      </p:sp>
-      <p:sp>
-        <p:nvSpPr>
-          <p:cNvPr id="11" name="TextBox 10"/>
-          <p:cNvSpPr txBox="1"/>
-          <p:nvPr/>
-        </p:nvSpPr>
-        <p:spPr>
-          <a:xfrm>
-            <a:off x="8641080" y="1874519"/>
-            <a:ext cx="3047695" cy="3566160"/>
-          </a:xfrm>
-          <a:prstGeom prst="rect">
-            <a:avLst/>
-          </a:prstGeom>
-          <a:noFill/>
-        </p:spPr>
-        <p:txBody>
-          <a:bodyPr wrap="square" anchor="t" lIns="0" rIns="0" tIns="0" bIns="0">
-            <a:spAutoFit/>
-          </a:bodyPr>
-          <a:lstStyle/>
-          <a:p>
-            <a:pPr algn="l">
-              <a:lnSpc>
-                <a:spcPct val="120000"/>
-              </a:lnSpc>
-              <a:spcBef>
-                <a:spcPts val="0"/>
-              </a:spcBef>
-              <a:spcAft>
-                <a:spcPts val="0"/>
-              </a:spcAft>
-            </a:pPr>
-            <a:r>
-              <a:rPr sz="1000" b="1" i="0">
-                <a:solidFill>
-                  <a:srgbClr val="0A0A0A"/>
-                </a:solidFill>
-                <a:latin typeface="Arial"/>
-              </a:rPr>
-              <a:t>Shown in order: </a:t>
-            </a:r>
-            <a:r>
-              <a:rPr sz="1000" b="0" i="0">
-                <a:solidFill>
-                  <a:srgbClr val="777777"/>
-                </a:solidFill>
-                <a:latin typeface="Arial"/>
-              </a:rPr>
-              <a:t>the principle and the loop bar, all nine live lesson stages with every interaction exercised — context-lifetime controls toggled, the engine decision flipped to one hundred users, all three sponsor operations run, recalled memory applied, the result verified, the receipt persisted — then the challenge ladder, the résumé-vs-receipt comparison, the incentive-alignment thesis, the thirteen-phase continuous lab down to the GPU/HBM package and facility lanes, and the learner-to-contributor journey closing on the portfolio receipt.</a:t>
-            </a:r>
-          </a:p>
-          <a:p>
-            <a:pPr algn="l">
-              <a:lnSpc>
-                <a:spcPct val="120000"/>
-              </a:lnSpc>
-              <a:spcBef>
-                <a:spcPts val="1000"/>
-              </a:spcBef>
-              <a:spcAft>
-                <a:spcPts val="0"/>
-              </a:spcAft>
-            </a:pPr>
-            <a:r>
-              <a:rPr sz="1000" b="1" i="0">
-                <a:solidFill>
-                  <a:srgbClr val="0A0A0A"/>
-                </a:solidFill>
-                <a:latin typeface="Arial"/>
-              </a:rPr>
-              <a:t>Evidence boundary: </a:t>
-            </a:r>
-            <a:r>
-              <a:rPr sz="1000" b="0" i="0">
-                <a:solidFill>
-                  <a:srgbClr val="777777"/>
-                </a:solidFill>
-                <a:latin typeface="Arial"/>
-              </a:rPr>
-              <a:t>the walkthrough uses the demo's explicitly labeled deterministic fixture states. It does not present fixture data as a live production run.</a:t>
-            </a:r>
-          </a:p>
-        </p:txBody>
-      </p:sp>
-      <p:sp>
-        <p:nvSpPr>
-          <p:cNvPr id="12" name="Rectangle 11"/>
+      <p:sp>
+        <p:nvSpPr>
+          <p:cNvPr id="8" name="Oval 7"/>
           <p:cNvSpPr/>
           <p:nvPr/>
         </p:nvSpPr>
         <p:spPr>
           <a:xfrm>
-            <a:off x="502920" y="5349239"/>
-            <a:ext cx="1828800" cy="365760"/>
-          </a:xfrm>
-          <a:prstGeom prst="rect">
+            <a:off x="3977640" y="2798063"/>
+            <a:ext cx="914400" cy="914400"/>
+          </a:xfrm>
+          <a:prstGeom prst="ellipse">
             <a:avLst/>
           </a:prstGeom>
           <a:solidFill>
             <a:srgbClr val="FFFFFF"/>
           </a:solidFill>
-          <a:ln w="9525">
-            <a:solidFill>
-              <a:srgbClr val="E5E5E5"/>
-            </a:solidFill>
+          <a:ln>
+            <a:noFill/>
           </a:ln>
           <a:effectLst/>
         </p:spPr>
@@ -6137,14 +5935,14 @@
       </p:sp>
       <p:sp>
         <p:nvSpPr>
-          <p:cNvPr id="13" name="TextBox 12"/>
+          <p:cNvPr id="9" name="TextBox 8"/>
           <p:cNvSpPr txBox="1"/>
           <p:nvPr/>
         </p:nvSpPr>
         <p:spPr>
           <a:xfrm>
-            <a:off x="630936" y="5349239"/>
-            <a:ext cx="1572768" cy="365760"/>
+            <a:off x="3977640" y="2798063"/>
+            <a:ext cx="914400" cy="914400"/>
           </a:xfrm>
           <a:prstGeom prst="rect">
             <a:avLst/>
@@ -6152,7 +5950,144 @@
           <a:noFill/>
         </p:spPr>
         <p:txBody>
-          <a:bodyPr wrap="none" anchor="ctr" lIns="0" rIns="0" tIns="0" bIns="0">
+          <a:bodyPr wrap="square" anchor="ctr" lIns="0" rIns="0" tIns="0" bIns="0">
+            <a:spAutoFit/>
+          </a:bodyPr>
+          <a:lstStyle/>
+          <a:p>
+            <a:pPr algn="ctr">
+              <a:lnSpc>
+                <a:spcPct val="100000"/>
+              </a:lnSpc>
+              <a:spcBef>
+                <a:spcPts val="0"/>
+              </a:spcBef>
+              <a:spcAft>
+                <a:spcPts val="0"/>
+              </a:spcAft>
+            </a:pPr>
+            <a:r>
+              <a:rPr sz="3000" b="1" i="0">
+                <a:solidFill>
+                  <a:srgbClr val="0A0A0A"/>
+                </a:solidFill>
+                <a:latin typeface="Arial"/>
+              </a:rPr>
+              <a:t>▶</a:t>
+            </a:r>
+          </a:p>
+        </p:txBody>
+      </p:sp>
+      <p:sp>
+        <p:nvSpPr>
+          <p:cNvPr id="10" name="TextBox 9"/>
+          <p:cNvSpPr txBox="1"/>
+          <p:nvPr/>
+        </p:nvSpPr>
+        <p:spPr>
+          <a:xfrm>
+            <a:off x="1051560" y="3895342"/>
+            <a:ext cx="6766560" cy="411480"/>
+          </a:xfrm>
+          <a:prstGeom prst="rect">
+            <a:avLst/>
+          </a:prstGeom>
+          <a:noFill/>
+        </p:spPr>
+        <p:txBody>
+          <a:bodyPr wrap="square" anchor="ctr" lIns="0" rIns="0" tIns="0" bIns="0">
+            <a:spAutoFit/>
+          </a:bodyPr>
+          <a:lstStyle/>
+          <a:p>
+            <a:pPr algn="ctr">
+              <a:lnSpc>
+                <a:spcPct val="100000"/>
+              </a:lnSpc>
+              <a:spcBef>
+                <a:spcPts val="0"/>
+              </a:spcBef>
+              <a:spcAft>
+                <a:spcPts val="0"/>
+              </a:spcAft>
+            </a:pPr>
+            <a:r>
+              <a:rPr sz="1700" b="1" i="0">
+                <a:solidFill>
+                  <a:srgbClr val="FFFFFF"/>
+                </a:solidFill>
+                <a:latin typeface="Arial"/>
+                <a:hlinkClick r:id="rId2"/>
+              </a:rPr>
+              <a:t>Open the 1:48 lifecycle demo</a:t>
+            </a:r>
+          </a:p>
+        </p:txBody>
+      </p:sp>
+      <p:sp>
+        <p:nvSpPr>
+          <p:cNvPr id="11" name="TextBox 10"/>
+          <p:cNvSpPr txBox="1"/>
+          <p:nvPr/>
+        </p:nvSpPr>
+        <p:spPr>
+          <a:xfrm>
+            <a:off x="1051560" y="4352543"/>
+            <a:ext cx="6766560" cy="320040"/>
+          </a:xfrm>
+          <a:prstGeom prst="rect">
+            <a:avLst/>
+          </a:prstGeom>
+          <a:noFill/>
+        </p:spPr>
+        <p:txBody>
+          <a:bodyPr wrap="square" anchor="ctr" lIns="0" rIns="0" tIns="0" bIns="0">
+            <a:spAutoFit/>
+          </a:bodyPr>
+          <a:lstStyle/>
+          <a:p>
+            <a:pPr algn="ctr">
+              <a:lnSpc>
+                <a:spcPct val="100000"/>
+              </a:lnSpc>
+              <a:spcBef>
+                <a:spcPts val="0"/>
+              </a:spcBef>
+              <a:spcAft>
+                <a:spcPts val="0"/>
+              </a:spcAft>
+            </a:pPr>
+            <a:r>
+              <a:rPr sz="1050" b="0" i="0">
+                <a:solidFill>
+                  <a:srgbClr val="999999"/>
+                </a:solidFill>
+                <a:latin typeface="Courier New"/>
+                <a:hlinkClick r:id="rId2"/>
+              </a:rPr>
+              <a:t>demo-video/touchdown-inference-lab-lifecycle-demo.mp4</a:t>
+            </a:r>
+          </a:p>
+        </p:txBody>
+      </p:sp>
+      <p:sp>
+        <p:nvSpPr>
+          <p:cNvPr id="12" name="TextBox 11"/>
+          <p:cNvSpPr txBox="1"/>
+          <p:nvPr/>
+        </p:nvSpPr>
+        <p:spPr>
+          <a:xfrm>
+            <a:off x="502920" y="5038343"/>
+            <a:ext cx="7863840" cy="274320"/>
+          </a:xfrm>
+          <a:prstGeom prst="rect">
+            <a:avLst/>
+          </a:prstGeom>
+          <a:noFill/>
+        </p:spPr>
+        <p:txBody>
+          <a:bodyPr wrap="square" anchor="t" lIns="0" rIns="0" tIns="0" bIns="0">
             <a:spAutoFit/>
           </a:bodyPr>
           <a:lstStyle/>
@@ -6169,13 +6104,98 @@
               </a:spcAft>
             </a:pPr>
             <a:r>
-              <a:rPr sz="900" b="1" i="0">
+              <a:rPr sz="850" b="1" i="0" spc="40">
+                <a:solidFill>
+                  <a:srgbClr val="999999"/>
+                </a:solidFill>
+                <a:latin typeface="Arial"/>
+              </a:rPr>
+              <a:t>1:48 RUNTIME · UNDER THE 2:00 CAP      1280 × 720 · H.264 · 30 FPS      BROWSER-ONLY WALKTHROUGH OF THE LIVE LOCAL BUILD</a:t>
+            </a:r>
+          </a:p>
+        </p:txBody>
+      </p:sp>
+      <p:sp>
+        <p:nvSpPr>
+          <p:cNvPr id="13" name="TextBox 12"/>
+          <p:cNvSpPr txBox="1"/>
+          <p:nvPr/>
+        </p:nvSpPr>
+        <p:spPr>
+          <a:xfrm>
+            <a:off x="8641080" y="2020823"/>
+            <a:ext cx="3047695" cy="3291840"/>
+          </a:xfrm>
+          <a:prstGeom prst="rect">
+            <a:avLst/>
+          </a:prstGeom>
+          <a:noFill/>
+        </p:spPr>
+        <p:txBody>
+          <a:bodyPr wrap="square" anchor="t" lIns="0" rIns="0" tIns="0" bIns="0">
+            <a:spAutoFit/>
+          </a:bodyPr>
+          <a:lstStyle/>
+          <a:p>
+            <a:pPr algn="l">
+              <a:lnSpc>
+                <a:spcPct val="120000"/>
+              </a:lnSpc>
+              <a:spcBef>
+                <a:spcPts val="0"/>
+              </a:spcBef>
+              <a:spcAft>
+                <a:spcPts val="0"/>
+              </a:spcAft>
+            </a:pPr>
+            <a:r>
+              <a:rPr sz="1000" b="1" i="0">
+                <a:solidFill>
+                  <a:srgbClr val="0A0A0A"/>
+                </a:solidFill>
+                <a:latin typeface="Arial"/>
+              </a:rPr>
+              <a:t>Shown in order: </a:t>
+            </a:r>
+            <a:r>
+              <a:rPr sz="1000" b="0" i="0">
                 <a:solidFill>
                   <a:srgbClr val="777777"/>
                 </a:solidFill>
                 <a:latin typeface="Arial"/>
               </a:rPr>
-              <a:t>npm test · 10/10</a:t>
+              <a:t>the principle and the loop bar, all nine live lesson stages with every interaction exercised — context-lifetime controls toggled, the engine decision flipped to one hundred users, all three sponsor operations run, recalled memory applied, the result verified, the receipt persisted — then the challenge ladder, the résumé-vs-receipt comparison, the incentive-alignment thesis, the thirteen-phase continuous lab down to the GPU/HBM package and facility lanes, and the learner-to-contributor journey closing on the portfolio receipt.</a:t>
+            </a:r>
+          </a:p>
+          <a:p>
+            <a:pPr algn="l">
+              <a:lnSpc>
+                <a:spcPct val="120000"/>
+              </a:lnSpc>
+              <a:spcBef>
+                <a:spcPts val="1000"/>
+              </a:spcBef>
+              <a:spcAft>
+                <a:spcPts val="0"/>
+              </a:spcAft>
+            </a:pPr>
+            <a:r>
+              <a:rPr sz="1000" b="1" i="0">
+                <a:solidFill>
+                  <a:srgbClr val="0A0A0A"/>
+                </a:solidFill>
+                <a:latin typeface="Arial"/>
+              </a:rPr>
+              <a:t>Evidence boundary: </a:t>
+            </a:r>
+            <a:r>
+              <a:rPr sz="1000" b="0" i="0">
+                <a:solidFill>
+                  <a:srgbClr val="777777"/>
+                </a:solidFill>
+                <a:latin typeface="Arial"/>
+              </a:rPr>
+              <a:t>the walkthrough uses the demo's explicitly labeled deterministic fixture states. It does not present fixture data as a live production run.</a:t>
             </a:r>
           </a:p>
         </p:txBody>
@@ -6188,8 +6208,8 @@
         </p:nvSpPr>
         <p:spPr>
           <a:xfrm>
-            <a:off x="2459736" y="5349239"/>
-            <a:ext cx="2286000" cy="365760"/>
+            <a:off x="502920" y="5495543"/>
+            <a:ext cx="1828800" cy="365760"/>
           </a:xfrm>
           <a:prstGeom prst="rect">
             <a:avLst/>
@@ -6234,8 +6254,8 @@
         </p:nvSpPr>
         <p:spPr>
           <a:xfrm>
-            <a:off x="2587752" y="5349239"/>
-            <a:ext cx="2029968" cy="365760"/>
+            <a:off x="630936" y="5495543"/>
+            <a:ext cx="1572768" cy="365760"/>
           </a:xfrm>
           <a:prstGeom prst="rect">
             <a:avLst/>
@@ -6266,7 +6286,7 @@
                 </a:solidFill>
                 <a:latin typeface="Arial"/>
               </a:rPr>
-              <a:t>npm run verify · pass</a:t>
+              <a:t>npm test · 10/10</a:t>
             </a:r>
           </a:p>
         </p:txBody>
@@ -6279,7 +6299,7 @@
         </p:nvSpPr>
         <p:spPr>
           <a:xfrm>
-            <a:off x="4873752" y="5349239"/>
+            <a:off x="2459736" y="5495543"/>
             <a:ext cx="2286000" cy="365760"/>
           </a:xfrm>
           <a:prstGeom prst="rect">
@@ -6325,7 +6345,7 @@
         </p:nvSpPr>
         <p:spPr>
           <a:xfrm>
-            <a:off x="5001768" y="5349239"/>
+            <a:off x="2587752" y="5495543"/>
             <a:ext cx="2029968" cy="365760"/>
           </a:xfrm>
           <a:prstGeom prst="rect">
@@ -6357,7 +6377,7 @@
                 </a:solidFill>
                 <a:latin typeface="Arial"/>
               </a:rPr>
-              <a:t>Butterbase live write</a:t>
+              <a:t>npm run verify · pass</a:t>
             </a:r>
           </a:p>
         </p:txBody>
@@ -6370,8 +6390,8 @@
         </p:nvSpPr>
         <p:spPr>
           <a:xfrm>
-            <a:off x="7287768" y="5349239"/>
-            <a:ext cx="2926080" cy="365760"/>
+            <a:off x="4873752" y="5495543"/>
+            <a:ext cx="2286000" cy="365760"/>
           </a:xfrm>
           <a:prstGeom prst="rect">
             <a:avLst/>
@@ -6416,8 +6436,8 @@
         </p:nvSpPr>
         <p:spPr>
           <a:xfrm>
-            <a:off x="7415784" y="5349239"/>
-            <a:ext cx="2670048" cy="365760"/>
+            <a:off x="5001768" y="5495543"/>
+            <a:ext cx="2029968" cy="365760"/>
           </a:xfrm>
           <a:prstGeom prst="rect">
             <a:avLst/>
@@ -6448,7 +6468,7 @@
                 </a:solidFill>
                 <a:latin typeface="Arial"/>
               </a:rPr>
-              <a:t>Receipt schema + secret scan</a:t>
+              <a:t>Butterbase live write</a:t>
             </a:r>
           </a:p>
         </p:txBody>
@@ -6461,17 +6481,19 @@
         </p:nvSpPr>
         <p:spPr>
           <a:xfrm>
-            <a:off x="502920" y="6355080"/>
-            <a:ext cx="11185855" cy="15875"/>
+            <a:off x="7287768" y="5495543"/>
+            <a:ext cx="2926080" cy="365760"/>
           </a:xfrm>
           <a:prstGeom prst="rect">
             <a:avLst/>
           </a:prstGeom>
           <a:solidFill>
-            <a:srgbClr val="E5E5E5"/>
+            <a:srgbClr val="FFFFFF"/>
           </a:solidFill>
-          <a:ln>
-            <a:noFill/>
+          <a:ln w="9525">
+            <a:solidFill>
+              <a:srgbClr val="E5E5E5"/>
+            </a:solidFill>
           </a:ln>
           <a:effectLst/>
         </p:spPr>
@@ -6505,8 +6527,8 @@
         </p:nvSpPr>
         <p:spPr>
           <a:xfrm>
-            <a:off x="502920" y="6428232"/>
-            <a:ext cx="8229600" cy="274320"/>
+            <a:off x="7415784" y="5495543"/>
+            <a:ext cx="2670048" cy="365760"/>
           </a:xfrm>
           <a:prstGeom prst="rect">
             <a:avLst/>
@@ -6514,7 +6536,7 @@
           <a:noFill/>
         </p:spPr>
         <p:txBody>
-          <a:bodyPr wrap="square" anchor="t" lIns="0" rIns="0" tIns="0" bIns="0">
+          <a:bodyPr wrap="none" anchor="ctr" lIns="0" rIns="0" tIns="0" bIns="0">
             <a:spAutoFit/>
           </a:bodyPr>
           <a:lstStyle/>
@@ -6531,26 +6553,115 @@
               </a:spcAft>
             </a:pPr>
             <a:r>
-              <a:rPr sz="1000" b="0" i="0">
-                <a:solidFill>
-                  <a:srgbClr val="999999"/>
-                </a:solidFill>
-                <a:latin typeface="Arial"/>
-              </a:rPr>
-              <a:t>Touchdown Labs · AI for Education Hackathon · Stanford · July 2026</a:t>
-            </a:r>
-          </a:p>
-        </p:txBody>
-      </p:sp>
-      <p:sp>
-        <p:nvSpPr>
-          <p:cNvPr id="22" name="TextBox 21"/>
+              <a:rPr sz="900" b="1" i="0">
+                <a:solidFill>
+                  <a:srgbClr val="777777"/>
+                </a:solidFill>
+                <a:latin typeface="Arial"/>
+              </a:rPr>
+              <a:t>Receipt schema + secret scan</a:t>
+            </a:r>
+          </a:p>
+        </p:txBody>
+      </p:sp>
+      <p:sp>
+        <p:nvSpPr>
+          <p:cNvPr id="22" name="Rectangle 21"/>
+          <p:cNvSpPr/>
+          <p:nvPr/>
+        </p:nvSpPr>
+        <p:spPr>
+          <a:xfrm>
+            <a:off x="502920" y="6473952"/>
+            <a:ext cx="11185855" cy="15875"/>
+          </a:xfrm>
+          <a:prstGeom prst="rect">
+            <a:avLst/>
+          </a:prstGeom>
+          <a:solidFill>
+            <a:srgbClr val="E5E5E5"/>
+          </a:solidFill>
+          <a:ln>
+            <a:noFill/>
+          </a:ln>
+          <a:effectLst/>
+        </p:spPr>
+        <p:style>
+          <a:lnRef idx="1">
+            <a:schemeClr val="accent1"/>
+          </a:lnRef>
+          <a:fillRef idx="3">
+            <a:schemeClr val="accent1"/>
+          </a:fillRef>
+          <a:effectRef idx="2">
+            <a:schemeClr val="accent1"/>
+          </a:effectRef>
+          <a:fontRef idx="minor">
+            <a:schemeClr val="lt1"/>
+          </a:fontRef>
+        </p:style>
+        <p:txBody>
+          <a:bodyPr rtlCol="0" anchor="ctr"/>
+          <a:lstStyle/>
+          <a:p>
+            <a:pPr algn="ctr"/>
+          </a:p>
+        </p:txBody>
+      </p:sp>
+      <p:sp>
+        <p:nvSpPr>
+          <p:cNvPr id="23" name="TextBox 22"/>
           <p:cNvSpPr txBox="1"/>
           <p:nvPr/>
         </p:nvSpPr>
         <p:spPr>
           <a:xfrm>
-            <a:off x="9859975" y="6428232"/>
+            <a:off x="502920" y="6547104"/>
+            <a:ext cx="8229600" cy="274320"/>
+          </a:xfrm>
+          <a:prstGeom prst="rect">
+            <a:avLst/>
+          </a:prstGeom>
+          <a:noFill/>
+        </p:spPr>
+        <p:txBody>
+          <a:bodyPr wrap="square" anchor="t" lIns="0" rIns="0" tIns="0" bIns="0">
+            <a:spAutoFit/>
+          </a:bodyPr>
+          <a:lstStyle/>
+          <a:p>
+            <a:pPr algn="l">
+              <a:lnSpc>
+                <a:spcPct val="100000"/>
+              </a:lnSpc>
+              <a:spcBef>
+                <a:spcPts val="0"/>
+              </a:spcBef>
+              <a:spcAft>
+                <a:spcPts val="0"/>
+              </a:spcAft>
+            </a:pPr>
+            <a:r>
+              <a:rPr sz="1000" b="0" i="0">
+                <a:solidFill>
+                  <a:srgbClr val="999999"/>
+                </a:solidFill>
+                <a:latin typeface="Arial"/>
+              </a:rPr>
+              <a:t>Touchdown Labs · AI for Education Hackathon · Stanford · July 2026</a:t>
+            </a:r>
+          </a:p>
+        </p:txBody>
+      </p:sp>
+      <p:sp>
+        <p:nvSpPr>
+          <p:cNvPr id="24" name="TextBox 23"/>
+          <p:cNvSpPr txBox="1"/>
+          <p:nvPr/>
+        </p:nvSpPr>
+        <p:spPr>
+          <a:xfrm>
+            <a:off x="9859975" y="6547104"/>
             <a:ext cx="1828800" cy="274320"/>
           </a:xfrm>
           <a:prstGeom prst="rect">
